--- a/02_Area/Lecture_측정평가/template.pptx
+++ b/02_Area/Lecture_측정평가/template.pptx
@@ -443,7 +443,7 @@
           <a:p>
             <a:fld id="{241EB5C9-1307-BA42-ABA2-0BC069CD8E7F}" type="datetimeFigureOut">
               <a:rPr lang="en-US" smtClean="0"/>
-              <a:t>9/29/26</a:t>
+              <a:t>10/5/26</a:t>
             </a:fld>
             <a:endParaRPr lang="en-US"/>
           </a:p>
@@ -635,7 +635,7 @@
           <a:p>
             <a:fld id="{241EB5C9-1307-BA42-ABA2-0BC069CD8E7F}" type="datetimeFigureOut">
               <a:rPr lang="en-US" smtClean="0"/>
-              <a:t>9/29/26</a:t>
+              <a:t>10/5/26</a:t>
             </a:fld>
             <a:endParaRPr lang="en-US"/>
           </a:p>
@@ -912,7 +912,7 @@
                 <a:latin typeface="더잠실 3 Regular" panose="00000500000000000000" pitchFamily="2" charset="-127"/>
                 <a:ea typeface="더잠실 3 Regular" panose="00000500000000000000" pitchFamily="2" charset="-127"/>
               </a:rPr>
-              <a:t>상관분석</a:t>
+              <a:t>신뢰도</a:t>
             </a:r>
             <a:r>
               <a:rPr lang="ko-KR" altLang="en-US" sz="2000" spc="-300" dirty="0">
@@ -936,7 +936,7 @@
                 <a:latin typeface="Baguet Script" panose="00000500000000000000" pitchFamily="2" charset="0"/>
                 <a:ea typeface="ChosunilboNM" panose="02030304000000000000" pitchFamily="18" charset="-128"/>
               </a:rPr>
-              <a:t>Correlation</a:t>
+              <a:t>Reliability</a:t>
             </a:r>
           </a:p>
         </p:txBody>
@@ -980,7 +980,7 @@
                 <a:latin typeface="Baguet Script" panose="00000500000000000000" pitchFamily="2" charset="0"/>
                 <a:ea typeface="ChosunilboNM" panose="02030304000000000000" pitchFamily="18" charset="-128"/>
               </a:rPr>
-              <a:t>Section 04 |  </a:t>
+              <a:t>Section 05 |  </a:t>
             </a:r>
             <a:r>
               <a:rPr lang="ko-KR" altLang="en-US" sz="2000" b="1" spc="-150" dirty="0">
@@ -993,7 +993,7 @@
                 <a:latin typeface="더잠실 3 Regular" panose="00000500000000000000" pitchFamily="2" charset="-127"/>
                 <a:ea typeface="더잠실 3 Regular" panose="00000500000000000000" pitchFamily="2" charset="-127"/>
               </a:rPr>
-              <a:t>상관과 예측</a:t>
+              <a:t>신뢰도</a:t>
             </a:r>
           </a:p>
         </p:txBody>
@@ -1195,7 +1195,7 @@
           <a:p>
             <a:fld id="{241EB5C9-1307-BA42-ABA2-0BC069CD8E7F}" type="datetimeFigureOut">
               <a:rPr lang="en-US" smtClean="0"/>
-              <a:t>9/29/26</a:t>
+              <a:t>10/5/26</a:t>
             </a:fld>
             <a:endParaRPr lang="en-US"/>
           </a:p>
@@ -1494,7 +1494,7 @@
           <a:p>
             <a:fld id="{241EB5C9-1307-BA42-ABA2-0BC069CD8E7F}" type="datetimeFigureOut">
               <a:rPr lang="en-US" smtClean="0"/>
-              <a:t>9/29/26</a:t>
+              <a:t>10/5/26</a:t>
             </a:fld>
             <a:endParaRPr lang="en-US"/>
           </a:p>
@@ -1927,7 +1927,7 @@
           <a:p>
             <a:fld id="{241EB5C9-1307-BA42-ABA2-0BC069CD8E7F}" type="datetimeFigureOut">
               <a:rPr lang="en-US" smtClean="0"/>
-              <a:t>9/29/26</a:t>
+              <a:t>10/5/26</a:t>
             </a:fld>
             <a:endParaRPr lang="en-US"/>
           </a:p>
@@ -2058,7 +2058,7 @@
           <a:p>
             <a:fld id="{241EB5C9-1307-BA42-ABA2-0BC069CD8E7F}" type="datetimeFigureOut">
               <a:rPr lang="en-US" smtClean="0"/>
-              <a:t>9/29/26</a:t>
+              <a:t>10/5/26</a:t>
             </a:fld>
             <a:endParaRPr lang="en-US"/>
           </a:p>
@@ -2167,7 +2167,7 @@
           <a:p>
             <a:fld id="{241EB5C9-1307-BA42-ABA2-0BC069CD8E7F}" type="datetimeFigureOut">
               <a:rPr lang="en-US" smtClean="0"/>
-              <a:t>9/29/26</a:t>
+              <a:t>10/5/26</a:t>
             </a:fld>
             <a:endParaRPr lang="en-US"/>
           </a:p>
@@ -2456,7 +2456,7 @@
           <a:p>
             <a:fld id="{241EB5C9-1307-BA42-ABA2-0BC069CD8E7F}" type="datetimeFigureOut">
               <a:rPr lang="en-US" smtClean="0"/>
-              <a:t>9/29/26</a:t>
+              <a:t>10/5/26</a:t>
             </a:fld>
             <a:endParaRPr lang="en-US"/>
           </a:p>
@@ -2722,7 +2722,7 @@
           <a:p>
             <a:fld id="{241EB5C9-1307-BA42-ABA2-0BC069CD8E7F}" type="datetimeFigureOut">
               <a:rPr lang="en-US" smtClean="0"/>
-              <a:t>9/29/26</a:t>
+              <a:t>10/5/26</a:t>
             </a:fld>
             <a:endParaRPr lang="en-US"/>
           </a:p>
@@ -2933,7 +2933,7 @@
           <a:p>
             <a:fld id="{241EB5C9-1307-BA42-ABA2-0BC069CD8E7F}" type="datetimeFigureOut">
               <a:rPr lang="en-US" smtClean="0"/>
-              <a:t>9/29/26</a:t>
+              <a:t>10/5/26</a:t>
             </a:fld>
             <a:endParaRPr lang="en-US"/>
           </a:p>
